--- a/Target Folder/QA-Files/zh-CN/Topics_Presentation.pptx
+++ b/Target Folder/QA-Files/zh-CN/Topics_Presentation.pptx
@@ -3135,7 +3135,7 @@
           <a:p>
             <a:r>
               <a:rPr/>
-              <a:t>霸凌者通常通过引起恐惧来获得权力感，这...</a:t>
+              <a:t>霸凌者通常通过引起受害者的恐惧、不安或愤怒来获得权力感...</a:t>
             </a:r>
           </a:p>
         </p:txBody>
@@ -3204,7 +3204,7 @@
           <a:p>
             <a:r>
               <a:rPr/>
-              <a:t>道德生活要求个人行为与普适原则保持自觉一致，这...</a:t>
+              <a:t>伦理生活要求一个人的行为与普适原则保持自觉一致...</a:t>
             </a:r>
           </a:p>
         </p:txBody>
